--- a/NFX_Prezentacja.pptx
+++ b/NFX_Prezentacja.pptx
@@ -3414,30 +3414,6 @@
           </a:p>
         </p:txBody>
       </p:sp>
-      <p:pic>
-        <p:nvPicPr>
-          <p:cNvPr id="6" name="Image 0" descr="C:\Users\czare\Desktop\studia\sem6\Hurtownie\NFX_Implementation\07_reports\report_1_global_price_map.png"/>
-          <p:cNvPicPr>
-            <a:picLocks noChangeAspect="1"/>
-          </p:cNvPicPr>
-          <p:nvPr/>
-        </p:nvPicPr>
-        <p:blipFill>
-          <a:blip r:embed="rId3"/>
-          <a:stretch>
-            <a:fillRect/>
-          </a:stretch>
-        </p:blipFill>
-        <p:spPr>
-          <a:xfrm>
-            <a:off x="365760" y="960120"/>
-            <a:ext cx="5440680" cy="3849624"/>
-          </a:xfrm>
-          <a:prstGeom prst="rect">
-            <a:avLst/>
-          </a:prstGeom>
-        </p:spPr>
-      </p:pic>
       <p:sp>
         <p:nvSpPr>
           <p:cNvPr id="7" name="Shape 4"/>
@@ -3581,7 +3557,51 @@
                 <a:ea typeface="Calibri" pitchFamily="34" charset="-122"/>
                 <a:cs typeface="Calibri" pitchFamily="34" charset="-120"/>
               </a:rPr>
-              <a:t>Cena modelu w PLN na 39 rynkach</a:t>
+              <a:t>Cena modelu w PLN </a:t>
+            </a:r>
+            <a:r>
+              <a:rPr lang="en-US" sz="1250" dirty="0" err="1">
+                <a:solidFill>
+                  <a:srgbClr val="2B2B2B"/>
+                </a:solidFill>
+                <a:latin typeface="Calibri" pitchFamily="34" charset="0"/>
+                <a:ea typeface="Calibri" pitchFamily="34" charset="-122"/>
+                <a:cs typeface="Calibri" pitchFamily="34" charset="-120"/>
+              </a:rPr>
+              <a:t>na</a:t>
+            </a:r>
+            <a:r>
+              <a:rPr lang="en-US" sz="1250" dirty="0">
+                <a:solidFill>
+                  <a:srgbClr val="2B2B2B"/>
+                </a:solidFill>
+                <a:latin typeface="Calibri" pitchFamily="34" charset="0"/>
+                <a:ea typeface="Calibri" pitchFamily="34" charset="-122"/>
+                <a:cs typeface="Calibri" pitchFamily="34" charset="-120"/>
+              </a:rPr>
+              <a:t> 3</a:t>
+            </a:r>
+            <a:r>
+              <a:rPr lang="pl-PL" sz="1250" dirty="0">
+                <a:solidFill>
+                  <a:srgbClr val="2B2B2B"/>
+                </a:solidFill>
+                <a:latin typeface="Calibri" pitchFamily="34" charset="0"/>
+                <a:ea typeface="Calibri" pitchFamily="34" charset="-122"/>
+                <a:cs typeface="Calibri" pitchFamily="34" charset="-120"/>
+              </a:rPr>
+              <a:t>2</a:t>
+            </a:r>
+            <a:r>
+              <a:rPr lang="en-US" sz="1250" dirty="0">
+                <a:solidFill>
+                  <a:srgbClr val="2B2B2B"/>
+                </a:solidFill>
+                <a:latin typeface="Calibri" pitchFamily="34" charset="0"/>
+                <a:ea typeface="Calibri" pitchFamily="34" charset="-122"/>
+                <a:cs typeface="Calibri" pitchFamily="34" charset="-120"/>
+              </a:rPr>
+              <a:t> rynkach</a:t>
             </a:r>
             <a:endParaRPr lang="en-US" sz="1250" dirty="0"/>
           </a:p>
@@ -3599,7 +3619,51 @@
                 <a:ea typeface="Calibri" pitchFamily="34" charset="-122"/>
                 <a:cs typeface="Calibri" pitchFamily="34" charset="-120"/>
               </a:rPr>
-              <a:t>Najtaniej: Japonia 464 zł</a:t>
+              <a:t>Najtaniej: </a:t>
+            </a:r>
+            <a:r>
+              <a:rPr lang="pl-PL" sz="1250" dirty="0">
+                <a:solidFill>
+                  <a:srgbClr val="2B2B2B"/>
+                </a:solidFill>
+                <a:latin typeface="Calibri" pitchFamily="34" charset="0"/>
+                <a:ea typeface="Calibri" pitchFamily="34" charset="-122"/>
+                <a:cs typeface="Calibri" pitchFamily="34" charset="-120"/>
+              </a:rPr>
+              <a:t>Indonezja</a:t>
+            </a:r>
+            <a:r>
+              <a:rPr lang="en-US" sz="1250" dirty="0">
+                <a:solidFill>
+                  <a:srgbClr val="2B2B2B"/>
+                </a:solidFill>
+                <a:latin typeface="Calibri" pitchFamily="34" charset="0"/>
+                <a:ea typeface="Calibri" pitchFamily="34" charset="-122"/>
+                <a:cs typeface="Calibri" pitchFamily="34" charset="-120"/>
+              </a:rPr>
+              <a:t> </a:t>
+            </a:r>
+            <a:r>
+              <a:rPr lang="pl-PL" sz="1250" dirty="0">
+                <a:solidFill>
+                  <a:srgbClr val="2B2B2B"/>
+                </a:solidFill>
+                <a:latin typeface="Calibri" pitchFamily="34" charset="0"/>
+                <a:ea typeface="Calibri" pitchFamily="34" charset="-122"/>
+                <a:cs typeface="Calibri" pitchFamily="34" charset="-120"/>
+              </a:rPr>
+              <a:t>102</a:t>
+            </a:r>
+            <a:r>
+              <a:rPr lang="en-US" sz="1250" dirty="0">
+                <a:solidFill>
+                  <a:srgbClr val="2B2B2B"/>
+                </a:solidFill>
+                <a:latin typeface="Calibri" pitchFamily="34" charset="0"/>
+                <a:ea typeface="Calibri" pitchFamily="34" charset="-122"/>
+                <a:cs typeface="Calibri" pitchFamily="34" charset="-120"/>
+              </a:rPr>
+              <a:t> zł</a:t>
             </a:r>
             <a:endParaRPr lang="en-US" sz="1250" dirty="0"/>
           </a:p>
@@ -3617,7 +3681,51 @@
                 <a:ea typeface="Calibri" pitchFamily="34" charset="-122"/>
                 <a:cs typeface="Calibri" pitchFamily="34" charset="-120"/>
               </a:rPr>
-              <a:t>Najdrożej: Szwajcaria 1033 zł</a:t>
+              <a:t>Najdrożej: </a:t>
+            </a:r>
+            <a:r>
+              <a:rPr lang="en-US" sz="1250" dirty="0" err="1">
+                <a:solidFill>
+                  <a:srgbClr val="2B2B2B"/>
+                </a:solidFill>
+                <a:latin typeface="Calibri" pitchFamily="34" charset="0"/>
+                <a:ea typeface="Calibri" pitchFamily="34" charset="-122"/>
+                <a:cs typeface="Calibri" pitchFamily="34" charset="-120"/>
+              </a:rPr>
+              <a:t>Szwajcaria</a:t>
+            </a:r>
+            <a:r>
+              <a:rPr lang="en-US" sz="1250" dirty="0">
+                <a:solidFill>
+                  <a:srgbClr val="2B2B2B"/>
+                </a:solidFill>
+                <a:latin typeface="Calibri" pitchFamily="34" charset="0"/>
+                <a:ea typeface="Calibri" pitchFamily="34" charset="-122"/>
+                <a:cs typeface="Calibri" pitchFamily="34" charset="-120"/>
+              </a:rPr>
+              <a:t> </a:t>
+            </a:r>
+            <a:r>
+              <a:rPr lang="pl-PL" sz="1250" dirty="0">
+                <a:solidFill>
+                  <a:srgbClr val="2B2B2B"/>
+                </a:solidFill>
+                <a:latin typeface="Calibri" pitchFamily="34" charset="0"/>
+                <a:ea typeface="Calibri" pitchFamily="34" charset="-122"/>
+                <a:cs typeface="Calibri" pitchFamily="34" charset="-120"/>
+              </a:rPr>
+              <a:t>241</a:t>
+            </a:r>
+            <a:r>
+              <a:rPr lang="en-US" sz="1250" dirty="0">
+                <a:solidFill>
+                  <a:srgbClr val="2B2B2B"/>
+                </a:solidFill>
+                <a:latin typeface="Calibri" pitchFamily="34" charset="0"/>
+                <a:ea typeface="Calibri" pitchFamily="34" charset="-122"/>
+                <a:cs typeface="Calibri" pitchFamily="34" charset="-120"/>
+              </a:rPr>
+              <a:t> zł</a:t>
             </a:r>
             <a:endParaRPr lang="en-US" sz="1250" dirty="0"/>
           </a:p>
@@ -3635,7 +3743,73 @@
                 <a:ea typeface="Calibri" pitchFamily="34" charset="-122"/>
                 <a:cs typeface="Calibri" pitchFamily="34" charset="-120"/>
               </a:rPr>
-              <a:t>Spread 569 zł · marża 123%</a:t>
+              <a:t>Spread </a:t>
+            </a:r>
+            <a:r>
+              <a:rPr lang="pl-PL" sz="1250" dirty="0">
+                <a:solidFill>
+                  <a:srgbClr val="2B2B2B"/>
+                </a:solidFill>
+                <a:latin typeface="Calibri" pitchFamily="34" charset="0"/>
+                <a:ea typeface="Calibri" pitchFamily="34" charset="-122"/>
+                <a:cs typeface="Calibri" pitchFamily="34" charset="-120"/>
+              </a:rPr>
+              <a:t>139</a:t>
+            </a:r>
+            <a:r>
+              <a:rPr lang="en-US" sz="1250" dirty="0">
+                <a:solidFill>
+                  <a:srgbClr val="2B2B2B"/>
+                </a:solidFill>
+                <a:latin typeface="Calibri" pitchFamily="34" charset="0"/>
+                <a:ea typeface="Calibri" pitchFamily="34" charset="-122"/>
+                <a:cs typeface="Calibri" pitchFamily="34" charset="-120"/>
+              </a:rPr>
+              <a:t> zł · </a:t>
+            </a:r>
+            <a:r>
+              <a:rPr lang="en-US" sz="1250" dirty="0" err="1">
+                <a:solidFill>
+                  <a:srgbClr val="2B2B2B"/>
+                </a:solidFill>
+                <a:latin typeface="Calibri" pitchFamily="34" charset="0"/>
+                <a:ea typeface="Calibri" pitchFamily="34" charset="-122"/>
+                <a:cs typeface="Calibri" pitchFamily="34" charset="-120"/>
+              </a:rPr>
+              <a:t>marża</a:t>
+            </a:r>
+            <a:r>
+              <a:rPr lang="en-US" sz="1250" dirty="0">
+                <a:solidFill>
+                  <a:srgbClr val="2B2B2B"/>
+                </a:solidFill>
+                <a:latin typeface="Calibri" pitchFamily="34" charset="0"/>
+                <a:ea typeface="Calibri" pitchFamily="34" charset="-122"/>
+                <a:cs typeface="Calibri" pitchFamily="34" charset="-120"/>
+              </a:rPr>
+              <a:t> </a:t>
+            </a:r>
+            <a:r>
+              <a:rPr lang="pl-PL" sz="1250" dirty="0">
+                <a:solidFill>
+                  <a:srgbClr val="2B2B2B"/>
+                </a:solidFill>
+                <a:latin typeface="Calibri" pitchFamily="34" charset="0"/>
+                <a:ea typeface="Calibri" pitchFamily="34" charset="-122"/>
+                <a:cs typeface="Calibri" pitchFamily="34" charset="-120"/>
+              </a:rPr>
+              <a:t>136</a:t>
+            </a:r>
+            <a:r>
+              <a:rPr lang="en-US" sz="1250" dirty="0">
+                <a:solidFill>
+                  <a:srgbClr val="2B2B2B"/>
+                </a:solidFill>
+                <a:latin typeface="Calibri" pitchFamily="34" charset="0"/>
+                <a:ea typeface="Calibri" pitchFamily="34" charset="-122"/>
+                <a:cs typeface="Calibri" pitchFamily="34" charset="-120"/>
+              </a:rPr>
+              <a:t>%</a:t>
             </a:r>
             <a:endParaRPr lang="en-US" sz="1250" dirty="0"/>
           </a:p>
@@ -3659,6 +3833,36 @@
           </a:p>
         </p:txBody>
       </p:sp>
+      <p:pic>
+        <p:nvPicPr>
+          <p:cNvPr id="14" name="Obraz 13">
+            <a:extLst>
+              <a:ext uri="{FF2B5EF4-FFF2-40B4-BE49-F238E27FC236}">
+                <a16:creationId xmlns:a16="http://schemas.microsoft.com/office/drawing/2014/main" id="{F73FF3A0-E27B-B9E3-130E-C1FE802C57A1}"/>
+              </a:ext>
+            </a:extLst>
+          </p:cNvPr>
+          <p:cNvPicPr>
+            <a:picLocks noChangeAspect="1"/>
+          </p:cNvPicPr>
+          <p:nvPr/>
+        </p:nvPicPr>
+        <p:blipFill>
+          <a:blip r:embed="rId3"/>
+          <a:stretch>
+            <a:fillRect/>
+          </a:stretch>
+        </p:blipFill>
+        <p:spPr>
+          <a:xfrm>
+            <a:off x="365761" y="1180586"/>
+            <a:ext cx="5440680" cy="3408691"/>
+          </a:xfrm>
+          <a:prstGeom prst="rect">
+            <a:avLst/>
+          </a:prstGeom>
+        </p:spPr>
+      </p:pic>
     </p:spTree>
   </p:cSld>
   <p:clrMapOvr>
@@ -3836,30 +4040,6 @@
           </a:p>
         </p:txBody>
       </p:sp>
-      <p:pic>
-        <p:nvPicPr>
-          <p:cNvPr id="6" name="Image 0" descr="C:\Users\czare\Desktop\studia\sem6\Hurtownie\NFX_Implementation\07_reports\report_2_arbitrage.png"/>
-          <p:cNvPicPr>
-            <a:picLocks noChangeAspect="1"/>
-          </p:cNvPicPr>
-          <p:nvPr/>
-        </p:nvPicPr>
-        <p:blipFill>
-          <a:blip r:embed="rId3"/>
-          <a:stretch>
-            <a:fillRect/>
-          </a:stretch>
-        </p:blipFill>
-        <p:spPr>
-          <a:xfrm>
-            <a:off x="365760" y="960120"/>
-            <a:ext cx="5440680" cy="3849624"/>
-          </a:xfrm>
-          <a:prstGeom prst="rect">
-            <a:avLst/>
-          </a:prstGeom>
-        </p:spPr>
-      </p:pic>
       <p:sp>
         <p:nvSpPr>
           <p:cNvPr id="7" name="Shape 4"/>
@@ -4021,7 +4201,29 @@
                 <a:ea typeface="Calibri" pitchFamily="34" charset="-122"/>
                 <a:cs typeface="Calibri" pitchFamily="34" charset="-120"/>
               </a:rPr>
-              <a:t>KPI: max spread 1 598 zł</a:t>
+              <a:t>KPI: max spread </a:t>
+            </a:r>
+            <a:r>
+              <a:rPr lang="pl-PL" sz="1250" dirty="0">
+                <a:solidFill>
+                  <a:srgbClr val="2B2B2B"/>
+                </a:solidFill>
+                <a:latin typeface="Calibri" pitchFamily="34" charset="0"/>
+                <a:ea typeface="Calibri" pitchFamily="34" charset="-122"/>
+                <a:cs typeface="Calibri" pitchFamily="34" charset="-120"/>
+              </a:rPr>
+              <a:t>955</a:t>
+            </a:r>
+            <a:r>
+              <a:rPr lang="en-US" sz="1250" dirty="0" err="1">
+                <a:solidFill>
+                  <a:srgbClr val="2B2B2B"/>
+                </a:solidFill>
+                <a:latin typeface="Calibri" pitchFamily="34" charset="0"/>
+                <a:ea typeface="Calibri" pitchFamily="34" charset="-122"/>
+                <a:cs typeface="Calibri" pitchFamily="34" charset="-120"/>
+              </a:rPr>
+              <a:t>zł</a:t>
             </a:r>
             <a:endParaRPr lang="en-US" sz="1250" dirty="0"/>
           </a:p>
@@ -4031,6 +4233,28 @@
               <a:buChar char="•"/>
             </a:pPr>
             <a:r>
+              <a:rPr lang="pl-PL" sz="1250" dirty="0">
+                <a:solidFill>
+                  <a:srgbClr val="2B2B2B"/>
+                </a:solidFill>
+                <a:latin typeface="Calibri" pitchFamily="34" charset="0"/>
+                <a:ea typeface="Calibri" pitchFamily="34" charset="-122"/>
+                <a:cs typeface="Calibri" pitchFamily="34" charset="-120"/>
+              </a:rPr>
+              <a:t>2214 </a:t>
+            </a:r>
+            <a:r>
+              <a:rPr lang="en-US" sz="1250" dirty="0" err="1">
+                <a:solidFill>
+                  <a:srgbClr val="2B2B2B"/>
+                </a:solidFill>
+                <a:latin typeface="Calibri" pitchFamily="34" charset="0"/>
+                <a:ea typeface="Calibri" pitchFamily="34" charset="-122"/>
+                <a:cs typeface="Calibri" pitchFamily="34" charset="-120"/>
+              </a:rPr>
+              <a:t>aktywnych</a:t>
+            </a:r>
+            <a:r>
               <a:rPr lang="en-US" sz="1250" dirty="0">
                 <a:solidFill>
                   <a:srgbClr val="2B2B2B"/>
@@ -4039,7 +4263,7 @@
                 <a:ea typeface="Calibri" pitchFamily="34" charset="-122"/>
                 <a:cs typeface="Calibri" pitchFamily="34" charset="-120"/>
               </a:rPr>
-              <a:t>9 227 aktywnych okazji (&gt;20%)</a:t>
+              <a:t> okazji (&gt;20%)</a:t>
             </a:r>
             <a:endParaRPr lang="en-US" sz="1250" dirty="0"/>
           </a:p>
@@ -4081,6 +4305,36 @@
           </a:p>
         </p:txBody>
       </p:sp>
+      <p:pic>
+        <p:nvPicPr>
+          <p:cNvPr id="12" name="Obraz 11">
+            <a:extLst>
+              <a:ext uri="{FF2B5EF4-FFF2-40B4-BE49-F238E27FC236}">
+                <a16:creationId xmlns:a16="http://schemas.microsoft.com/office/drawing/2014/main" id="{884AA3C8-5E36-E23C-CD0F-B18A23692F5E}"/>
+              </a:ext>
+            </a:extLst>
+          </p:cNvPr>
+          <p:cNvPicPr>
+            <a:picLocks noChangeAspect="1"/>
+          </p:cNvPicPr>
+          <p:nvPr/>
+        </p:nvPicPr>
+        <p:blipFill>
+          <a:blip r:embed="rId3"/>
+          <a:stretch>
+            <a:fillRect/>
+          </a:stretch>
+        </p:blipFill>
+        <p:spPr>
+          <a:xfrm>
+            <a:off x="365761" y="1124712"/>
+            <a:ext cx="5440680" cy="3404948"/>
+          </a:xfrm>
+          <a:prstGeom prst="rect">
+            <a:avLst/>
+          </a:prstGeom>
+        </p:spPr>
+      </p:pic>
     </p:spTree>
   </p:cSld>
   <p:clrMapOvr>
@@ -4258,30 +4512,6 @@
           </a:p>
         </p:txBody>
       </p:sp>
-      <p:pic>
-        <p:nvPicPr>
-          <p:cNvPr id="6" name="Image 0" descr="C:\Users\czare\Desktop\studia\sem6\Hurtownie\NFX_Implementation\07_reports\report_3_fx_dashboard.png"/>
-          <p:cNvPicPr>
-            <a:picLocks noChangeAspect="1"/>
-          </p:cNvPicPr>
-          <p:nvPr/>
-        </p:nvPicPr>
-        <p:blipFill>
-          <a:blip r:embed="rId3"/>
-          <a:stretch>
-            <a:fillRect/>
-          </a:stretch>
-        </p:blipFill>
-        <p:spPr>
-          <a:xfrm>
-            <a:off x="365760" y="960120"/>
-            <a:ext cx="5440680" cy="3849624"/>
-          </a:xfrm>
-          <a:prstGeom prst="rect">
-            <a:avLst/>
-          </a:prstGeom>
-        </p:spPr>
-      </p:pic>
       <p:sp>
         <p:nvSpPr>
           <p:cNvPr id="7" name="Shape 4"/>
@@ -4503,6 +4733,36 @@
           </a:p>
         </p:txBody>
       </p:sp>
+      <p:pic>
+        <p:nvPicPr>
+          <p:cNvPr id="12" name="Obraz 11">
+            <a:extLst>
+              <a:ext uri="{FF2B5EF4-FFF2-40B4-BE49-F238E27FC236}">
+                <a16:creationId xmlns:a16="http://schemas.microsoft.com/office/drawing/2014/main" id="{53276BD0-0F75-5618-4433-C56D369A6AFA}"/>
+              </a:ext>
+            </a:extLst>
+          </p:cNvPr>
+          <p:cNvPicPr>
+            <a:picLocks noChangeAspect="1"/>
+          </p:cNvPicPr>
+          <p:nvPr/>
+        </p:nvPicPr>
+        <p:blipFill>
+          <a:blip r:embed="rId3"/>
+          <a:stretch>
+            <a:fillRect/>
+          </a:stretch>
+        </p:blipFill>
+        <p:spPr>
+          <a:xfrm>
+            <a:off x="365760" y="1165416"/>
+            <a:ext cx="5440679" cy="3410980"/>
+          </a:xfrm>
+          <a:prstGeom prst="rect">
+            <a:avLst/>
+          </a:prstGeom>
+        </p:spPr>
+      </p:pic>
     </p:spTree>
   </p:cSld>
   <p:clrMapOvr>
@@ -5380,7 +5640,7 @@
               <a:buNone/>
             </a:pPr>
             <a:r>
-              <a:rPr lang="en-US" sz="2600" b="1" dirty="0">
+              <a:rPr lang="pl-PL" sz="2600" b="1" dirty="0">
                 <a:solidFill>
                   <a:srgbClr val="1F3864"/>
                 </a:solidFill>
@@ -5388,7 +5648,18 @@
                 <a:ea typeface="Segoe UI" pitchFamily="34" charset="-122"/>
                 <a:cs typeface="Segoe UI" pitchFamily="34" charset="-120"/>
               </a:rPr>
-              <a:t>894,5%</a:t>
+              <a:t>222.4</a:t>
+            </a:r>
+            <a:r>
+              <a:rPr lang="en-US" sz="2600" b="1" dirty="0">
+                <a:solidFill>
+                  <a:srgbClr val="1F3864"/>
+                </a:solidFill>
+                <a:latin typeface="Segoe UI" pitchFamily="34" charset="0"/>
+                <a:ea typeface="Segoe UI" pitchFamily="34" charset="-122"/>
+                <a:cs typeface="Segoe UI" pitchFamily="34" charset="-120"/>
+              </a:rPr>
+              <a:t>%</a:t>
             </a:r>
             <a:endParaRPr lang="en-US" sz="2600" dirty="0"/>
           </a:p>
@@ -5499,7 +5770,7 @@
               <a:buNone/>
             </a:pPr>
             <a:r>
-              <a:rPr lang="en-US" sz="2600" b="1" dirty="0">
+              <a:rPr lang="pl-PL" sz="2600" b="1" dirty="0">
                 <a:solidFill>
                   <a:srgbClr val="1F3864"/>
                 </a:solidFill>
@@ -5507,7 +5778,18 @@
                 <a:ea typeface="Segoe UI" pitchFamily="34" charset="-122"/>
                 <a:cs typeface="Segoe UI" pitchFamily="34" charset="-120"/>
               </a:rPr>
-              <a:t>1 598 zł</a:t>
+              <a:t>955</a:t>
+            </a:r>
+            <a:r>
+              <a:rPr lang="en-US" sz="2600" b="1" dirty="0">
+                <a:solidFill>
+                  <a:srgbClr val="1F3864"/>
+                </a:solidFill>
+                <a:latin typeface="Segoe UI" pitchFamily="34" charset="0"/>
+                <a:ea typeface="Segoe UI" pitchFamily="34" charset="-122"/>
+                <a:cs typeface="Segoe UI" pitchFamily="34" charset="-120"/>
+              </a:rPr>
+              <a:t> zł</a:t>
             </a:r>
             <a:endParaRPr lang="en-US" sz="2600" dirty="0"/>
           </a:p>
@@ -5899,56 +6181,6 @@
           </a:p>
         </p:txBody>
       </p:sp>
-      <p:sp>
-        <p:nvSpPr>
-          <p:cNvPr id="6" name="Text 4"/>
-          <p:cNvSpPr/>
-          <p:nvPr/>
-        </p:nvSpPr>
-        <p:spPr>
-          <a:xfrm>
-            <a:off x="822960" y="3840480"/>
-            <a:ext cx="7680960" cy="822960"/>
-          </a:xfrm>
-          <a:prstGeom prst="rect">
-            <a:avLst/>
-          </a:prstGeom>
-          <a:noFill/>
-          <a:ln/>
-        </p:spPr>
-        <p:txBody>
-          <a:bodyPr wrap="square" rtlCol="0" anchor="t"/>
-          <a:lstStyle/>
-          <a:p>
-            <a:pPr marL="0" indent="0">
-              <a:buNone/>
-            </a:pPr>
-            <a:r>
-              <a:rPr lang="en-US" sz="1250" b="1" i="1" dirty="0">
-                <a:solidFill>
-                  <a:srgbClr val="E8A000"/>
-                </a:solidFill>
-                <a:latin typeface="Calibri" pitchFamily="34" charset="0"/>
-                <a:ea typeface="Calibri" pitchFamily="34" charset="-122"/>
-                <a:cs typeface="Calibri" pitchFamily="34" charset="-120"/>
-              </a:rPr>
-              <a:t>Przygotowane odpowiedzi: </a:t>
-            </a:r>
-            <a:r>
-              <a:rPr lang="en-US" sz="1250" i="1" dirty="0">
-                <a:solidFill>
-                  <a:srgbClr val="C7CEE0"/>
-                </a:solidFill>
-                <a:latin typeface="Calibri" pitchFamily="34" charset="0"/>
-                <a:ea typeface="Calibri" pitchFamily="34" charset="-122"/>
-                <a:cs typeface="Calibri" pitchFamily="34" charset="-120"/>
-              </a:rPr>
-              <a:t>SCD2 (style_color) · deduplikacja FX (NOT EXISTS) · limit 93 dni (segmentacja) · liczenie marży (max−min)/min.</a:t>
-            </a:r>
-            <a:endParaRPr lang="en-US" sz="1250" dirty="0"/>
-          </a:p>
-        </p:txBody>
-      </p:sp>
     </p:spTree>
   </p:cSld>
   <p:clrMapOvr>
@@ -7723,7 +7955,7 @@
               <a:buNone/>
             </a:pPr>
             <a:r>
-              <a:rPr lang="en-US" sz="3000" b="1" dirty="0">
+              <a:rPr lang="pl-PL" sz="3000" b="1" dirty="0">
                 <a:solidFill>
                   <a:srgbClr val="E8A000"/>
                 </a:solidFill>
@@ -7731,7 +7963,18 @@
                 <a:ea typeface="Segoe UI" pitchFamily="34" charset="-122"/>
                 <a:cs typeface="Segoe UI" pitchFamily="34" charset="-120"/>
               </a:rPr>
-              <a:t>894,5%</a:t>
+              <a:t>222,4</a:t>
+            </a:r>
+            <a:r>
+              <a:rPr lang="en-US" sz="3000" b="1" dirty="0">
+                <a:solidFill>
+                  <a:srgbClr val="E8A000"/>
+                </a:solidFill>
+                <a:latin typeface="Segoe UI" pitchFamily="34" charset="0"/>
+                <a:ea typeface="Segoe UI" pitchFamily="34" charset="-122"/>
+                <a:cs typeface="Segoe UI" pitchFamily="34" charset="-120"/>
+              </a:rPr>
+              <a:t>%</a:t>
             </a:r>
             <a:endParaRPr lang="en-US" sz="3000" dirty="0"/>
           </a:p>
@@ -8625,7 +8868,7 @@
                 <a:ea typeface="Calibri" pitchFamily="34" charset="-122"/>
                 <a:cs typeface="Calibri" pitchFamily="34" charset="-120"/>
               </a:rPr>
-              <a:t>Źródła → ETL/ELT → Hurtownia (gwiazda) → Warstwa BI (widoki/DAX) → Raporty.  Pobranie NBP: Script Task C# (REST/JSON nie jest natywnym źródłem SSIS).</a:t>
+              <a:t>Źródła → ETL/ELT → Hurtownia (gwiazda) → Warstwa BI (widoki/DAX) → Raporty.  Pobranie NBP: Script Task C#.</a:t>
             </a:r>
             <a:endParaRPr lang="en-US" sz="1250" dirty="0"/>
           </a:p>
@@ -9519,78 +9762,6 @@
               <a:t>poza tabelami NBP A/B</a:t>
             </a:r>
             <a:endParaRPr lang="en-US" sz="1150" dirty="0"/>
-          </a:p>
-        </p:txBody>
-      </p:sp>
-      <p:sp>
-        <p:nvSpPr>
-          <p:cNvPr id="24" name="Text 22"/>
-          <p:cNvSpPr/>
-          <p:nvPr/>
-        </p:nvSpPr>
-        <p:spPr>
-          <a:xfrm>
-            <a:off x="548640" y="3794760"/>
-            <a:ext cx="8138160" cy="822960"/>
-          </a:xfrm>
-          <a:prstGeom prst="rect">
-            <a:avLst/>
-          </a:prstGeom>
-          <a:noFill/>
-          <a:ln/>
-        </p:spPr>
-        <p:txBody>
-          <a:bodyPr wrap="square" rtlCol="0" anchor="t"/>
-          <a:lstStyle/>
-          <a:p>
-            <a:pPr marL="0" indent="0">
-              <a:buNone/>
-            </a:pPr>
-            <a:r>
-              <a:rPr lang="en-US" sz="1350" b="1" dirty="0">
-                <a:solidFill>
-                  <a:srgbClr val="1F3864"/>
-                </a:solidFill>
-                <a:latin typeface="Calibri" pitchFamily="34" charset="0"/>
-                <a:ea typeface="Calibri" pitchFamily="34" charset="-122"/>
-                <a:cs typeface="Calibri" pitchFamily="34" charset="-120"/>
-              </a:rPr>
-              <a:t>Kluczowy wniosek: </a:t>
-            </a:r>
-            <a:r>
-              <a:rPr lang="en-US" sz="1350" dirty="0">
-                <a:solidFill>
-                  <a:srgbClr val="2B2B2B"/>
-                </a:solidFill>
-                <a:latin typeface="Calibri" pitchFamily="34" charset="0"/>
-                <a:ea typeface="Calibri" pitchFamily="34" charset="-122"/>
-                <a:cs typeface="Calibri" pitchFamily="34" charset="-120"/>
-              </a:rPr>
-              <a:t>realny schemat CSV różni się od KM1 → klucz naturalny produktu to </a:t>
-            </a:r>
-            <a:r>
-              <a:rPr lang="en-US" sz="1350" b="1" dirty="0">
-                <a:solidFill>
-                  <a:srgbClr val="1F3864"/>
-                </a:solidFill>
-                <a:latin typeface="Calibri" pitchFamily="34" charset="0"/>
-                <a:ea typeface="Calibri" pitchFamily="34" charset="-122"/>
-                <a:cs typeface="Calibri" pitchFamily="34" charset="-120"/>
-              </a:rPr>
-              <a:t>style_color</a:t>
-            </a:r>
-            <a:r>
-              <a:rPr lang="en-US" sz="1350" dirty="0">
-                <a:solidFill>
-                  <a:srgbClr val="2B2B2B"/>
-                </a:solidFill>
-                <a:latin typeface="Calibri" pitchFamily="34" charset="0"/>
-                <a:ea typeface="Calibri" pitchFamily="34" charset="-122"/>
-                <a:cs typeface="Calibri" pitchFamily="34" charset="-120"/>
-              </a:rPr>
-              <a:t> (model+kolor), nie UUID; podkategoria zlokalizowana (CJK) → NVARCHAR.</a:t>
-            </a:r>
-            <a:endParaRPr lang="en-US" sz="1350" dirty="0"/>
           </a:p>
         </p:txBody>
       </p:sp>
@@ -12233,7 +12404,51 @@
                 <a:ea typeface="Calibri" pitchFamily="34" charset="-122"/>
                 <a:cs typeface="Calibri" pitchFamily="34" charset="-120"/>
               </a:rPr>
-              <a:t>NikeETL_FX_Daily — codziennie 07:00 (kursy)</a:t>
+              <a:t>NikeETL_FX_Daily — </a:t>
+            </a:r>
+            <a:r>
+              <a:rPr lang="en-US" sz="1300" dirty="0" err="1">
+                <a:solidFill>
+                  <a:srgbClr val="2B2B2B"/>
+                </a:solidFill>
+                <a:latin typeface="Calibri" pitchFamily="34" charset="0"/>
+                <a:ea typeface="Calibri" pitchFamily="34" charset="-122"/>
+                <a:cs typeface="Calibri" pitchFamily="34" charset="-120"/>
+              </a:rPr>
+              <a:t>codziennie</a:t>
+            </a:r>
+            <a:r>
+              <a:rPr lang="en-US" sz="1300" dirty="0">
+                <a:solidFill>
+                  <a:srgbClr val="2B2B2B"/>
+                </a:solidFill>
+                <a:latin typeface="Calibri" pitchFamily="34" charset="0"/>
+                <a:ea typeface="Calibri" pitchFamily="34" charset="-122"/>
+                <a:cs typeface="Calibri" pitchFamily="34" charset="-120"/>
+              </a:rPr>
+              <a:t> 0</a:t>
+            </a:r>
+            <a:r>
+              <a:rPr lang="pl-PL" sz="1300" dirty="0">
+                <a:solidFill>
+                  <a:srgbClr val="2B2B2B"/>
+                </a:solidFill>
+                <a:latin typeface="Calibri" pitchFamily="34" charset="0"/>
+                <a:ea typeface="Calibri" pitchFamily="34" charset="-122"/>
+                <a:cs typeface="Calibri" pitchFamily="34" charset="-120"/>
+              </a:rPr>
+              <a:t>6</a:t>
+            </a:r>
+            <a:r>
+              <a:rPr lang="en-US" sz="1300" dirty="0">
+                <a:solidFill>
+                  <a:srgbClr val="2B2B2B"/>
+                </a:solidFill>
+                <a:latin typeface="Calibri" pitchFamily="34" charset="0"/>
+                <a:ea typeface="Calibri" pitchFamily="34" charset="-122"/>
+                <a:cs typeface="Calibri" pitchFamily="34" charset="-120"/>
+              </a:rPr>
+              <a:t>:00 (kursy)</a:t>
             </a:r>
             <a:endParaRPr lang="en-US" sz="1300" dirty="0"/>
           </a:p>
